--- a/ELATE_Presentation.pptx
+++ b/ELATE_Presentation.pptx
@@ -1848,14 +1848,8 @@
           <a:lstStyle/>
           <a:p>
             <a:r>
-              <a:rPr lang="zh-CN" altLang="zh-CN" sz="1200" b="0" i="1" kern="1200" dirty="0">
-                <a:solidFill>
-                  <a:schemeClr val="tx1"/>
-                </a:solidFill>
-                <a:effectLst/>
-                <a:latin typeface="+mn-lt"/>
-                <a:ea typeface="+mn-ea"/>
-                <a:cs typeface="+mn-cs"/>
+              <a:rPr sz="1200">
+                <a:latin typeface="Arial"/>
               </a:rPr>
               <a:t>That concludes our presentation on this paper. Thank you all for listening.</a:t>
             </a:r>
